--- a/data/employees/EMP051/AST-EMP051-01.pptx
+++ b/data/employees/EMP051/AST-EMP051-01.pptx
@@ -9,6 +9,7 @@
     <p:sldId id="257" r:id="rId8"/>
     <p:sldId id="258" r:id="rId9"/>
     <p:sldId id="259" r:id="rId10"/>
+    <p:sldId id="260" r:id="rId11"/>
   </p:sldIdLst>
   <p:sldSz cx="9144000" cy="6858000" type="screen4x3"/>
   <p:notesSz cx="6858000" cy="9144000"/>
@@ -3098,42 +3099,55 @@
             <a:spLocks noGrp="1"/>
           </p:cNvSpPr>
           <p:nvPr>
-            <p:ph type="ctrTitle"/>
-          </p:nvPr>
-        </p:nvSpPr>
-        <p:spPr/>
-        <p:txBody>
-          <a:bodyPr/>
-          <a:lstStyle/>
-          <a:p>
-            <a:r>
-              <a:t>Project update deck - EMP051</a:t>
-            </a:r>
-          </a:p>
-        </p:txBody>
-      </p:sp>
-      <p:sp>
-        <p:nvSpPr>
-          <p:cNvPr id="3" name="Subtitle 2"/>
-          <p:cNvSpPr>
-            <a:spLocks noGrp="1"/>
-          </p:cNvSpPr>
-          <p:nvPr>
-            <p:ph type="subTitle" idx="1"/>
-          </p:nvPr>
-        </p:nvSpPr>
-        <p:spPr/>
-        <p:txBody>
-          <a:bodyPr/>
-          <a:lstStyle/>
-          <a:p>
-            <a:r>
-              <a:t>Alex Garcia | Lead | IT</a:t>
-            </a:r>
-          </a:p>
-          <a:p>
-            <a:r>
-              <a:t>Prepared: 2025-02-22</a:t>
+            <p:ph type="title"/>
+          </p:nvPr>
+        </p:nvSpPr>
+        <p:spPr/>
+        <p:txBody>
+          <a:bodyPr/>
+          <a:lstStyle/>
+          <a:p>
+            <a:r>
+              <a:t>Ast Emp051 01 - EMP051</a:t>
+            </a:r>
+          </a:p>
+        </p:txBody>
+      </p:sp>
+      <p:sp>
+        <p:nvSpPr>
+          <p:cNvPr id="3" name="Content Placeholder 2"/>
+          <p:cNvSpPr>
+            <a:spLocks noGrp="1"/>
+          </p:cNvSpPr>
+          <p:nvPr>
+            <p:ph idx="1"/>
+          </p:nvPr>
+        </p:nvSpPr>
+        <p:spPr/>
+        <p:txBody>
+          <a:bodyPr/>
+          <a:lstStyle/>
+          <a:p>
+            <a:r>
+              <a:t>Slide 1: Executive Summary</a:t>
+            </a:r>
+          </a:p>
+          <a:p>
+            <a:pPr lvl="1"/>
+            <a:r>
+              <a:t>Section 1: Quarterly delivery milestones. EMP051 contributes to ast emp051 01 through recurring collaboration, clear ownership boundaries, and measurable outcomes. The team captures decisions, open issues, and handoffs so that knowledge remains discoverable for future programs.</a:t>
+            </a:r>
+          </a:p>
+          <a:p>
+            <a:pPr lvl="1"/>
+            <a:r>
+              <a:t>Section 2: Automation backlog refinement. EMP051 contributes to ast emp051 01 through recurring collaboration, clear ownership boundaries, and measurable outcomes. The team captures decisions, open issues, and handoffs so that knowledge remains discoverable for future programs.</a:t>
+            </a:r>
+          </a:p>
+          <a:p>
+            <a:pPr lvl="1"/>
+            <a:r>
+              <a:t>Section 3: Data quality remediation. EMP051 contributes to ast emp051 01 through recurring collaboration, clear ownership boundaries, and measurable outcomes. The team captures decisions, open issues, and handoffs so that knowledge remains discoverable for future programs.</a:t>
             </a:r>
           </a:p>
         </p:txBody>
@@ -3172,7 +3186,7 @@
           <a:lstStyle/>
           <a:p>
             <a:r>
-              <a:t>Infrastructure Utilisation Dashboard</a:t>
+              <a:t>Ast Emp051 01 - EMP051</a:t>
             </a:r>
           </a:p>
         </p:txBody>
@@ -3193,17 +3207,25 @@
           <a:lstStyle/>
           <a:p>
             <a:r>
-              <a:t>Overview of Infrastructure Utilisation Dashboard for IT department.</a:t>
-            </a:r>
-          </a:p>
-          <a:p>
-            <a:r>
-              <a:t>Responsible: Alex Garcia (Lead)</a:t>
-            </a:r>
-          </a:p>
-          <a:p>
-            <a:r>
-              <a:t>Location: Austin | Skills: Power BI, MLOps, Ontology, Python</a:t>
+              <a:t>Slide 2: Executive Summary</a:t>
+            </a:r>
+          </a:p>
+          <a:p>
+            <a:pPr lvl="1"/>
+            <a:r>
+              <a:t>Section 1: Department KPI performance. EMP051 contributes to ast emp051 01 through recurring collaboration, clear ownership boundaries, and measurable outcomes. The team captures decisions, open issues, and handoffs so that knowledge remains discoverable for future programs.</a:t>
+            </a:r>
+          </a:p>
+          <a:p>
+            <a:pPr lvl="1"/>
+            <a:r>
+              <a:t>Section 2: Automation backlog refinement. EMP051 contributes to ast emp051 01 through recurring collaboration, clear ownership boundaries, and measurable outcomes. The team captures decisions, open issues, and handoffs so that knowledge remains discoverable for future programs.</a:t>
+            </a:r>
+          </a:p>
+          <a:p>
+            <a:pPr lvl="1"/>
+            <a:r>
+              <a:t>Section 3: Fabric semantic model planning. EMP051 contributes to ast emp051 01 through recurring collaboration, clear ownership boundaries, and measurable outcomes. The team captures decisions, open issues, and handoffs so that knowledge remains discoverable for future programs.</a:t>
             </a:r>
           </a:p>
         </p:txBody>
@@ -3242,7 +3264,7 @@
           <a:lstStyle/>
           <a:p>
             <a:r>
-              <a:t>Security Patch Status</a:t>
+              <a:t>Ast Emp051 01 - EMP051</a:t>
             </a:r>
           </a:p>
         </p:txBody>
@@ -3263,17 +3285,25 @@
           <a:lstStyle/>
           <a:p>
             <a:r>
-              <a:t>Overview of Security Patch Status for IT department.</a:t>
-            </a:r>
-          </a:p>
-          <a:p>
-            <a:r>
-              <a:t>Responsible: Alex Garcia (Lead)</a:t>
-            </a:r>
-          </a:p>
-          <a:p>
-            <a:r>
-              <a:t>Location: Austin | Skills: Power BI, MLOps, Ontology, Python</a:t>
+              <a:t>Slide 3: Executive Summary</a:t>
+            </a:r>
+          </a:p>
+          <a:p>
+            <a:pPr lvl="1"/>
+            <a:r>
+              <a:t>Section 1: Knowledge transfer and onboarding. EMP051 contributes to ast emp051 01 through recurring collaboration, clear ownership boundaries, and measurable outcomes. The team captures decisions, open issues, and handoffs so that knowledge remains discoverable for future programs.</a:t>
+            </a:r>
+          </a:p>
+          <a:p>
+            <a:pPr lvl="1"/>
+            <a:r>
+              <a:t>Section 2: Quarterly delivery milestones. EMP051 contributes to ast emp051 01 through recurring collaboration, clear ownership boundaries, and measurable outcomes. The team captures decisions, open issues, and handoffs so that knowledge remains discoverable for future programs.</a:t>
+            </a:r>
+          </a:p>
+          <a:p>
+            <a:pPr lvl="1"/>
+            <a:r>
+              <a:t>Section 3: Customer escalation analysis. EMP051 contributes to ast emp051 01 through recurring collaboration, clear ownership boundaries, and measurable outcomes. The team captures decisions, open issues, and handoffs so that knowledge remains discoverable for future programs.</a:t>
             </a:r>
           </a:p>
         </p:txBody>
@@ -3312,7 +3342,7 @@
           <a:lstStyle/>
           <a:p>
             <a:r>
-              <a:t>Cloud Cost Optimisation</a:t>
+              <a:t>Ast Emp051 01 - EMP051</a:t>
             </a:r>
           </a:p>
         </p:txBody>
@@ -3333,17 +3363,103 @@
           <a:lstStyle/>
           <a:p>
             <a:r>
-              <a:t>Overview of Cloud Cost Optimisation for IT department.</a:t>
-            </a:r>
-          </a:p>
-          <a:p>
-            <a:r>
-              <a:t>Responsible: Alex Garcia (Lead)</a:t>
-            </a:r>
-          </a:p>
-          <a:p>
-            <a:r>
-              <a:t>Location: Austin | Skills: Power BI, MLOps, Ontology, Python</a:t>
+              <a:t>Slide 4: Executive Summary</a:t>
+            </a:r>
+          </a:p>
+          <a:p>
+            <a:pPr lvl="1"/>
+            <a:r>
+              <a:t>Section 1: Department KPI performance. EMP051 contributes to ast emp051 01 through recurring collaboration, clear ownership boundaries, and measurable outcomes. The team captures decisions, open issues, and handoffs so that knowledge remains discoverable for future programs.</a:t>
+            </a:r>
+          </a:p>
+          <a:p>
+            <a:pPr lvl="1"/>
+            <a:r>
+              <a:t>Section 2: Data quality remediation. EMP051 contributes to ast emp051 01 through recurring collaboration, clear ownership boundaries, and measurable outcomes. The team captures decisions, open issues, and handoffs so that knowledge remains discoverable for future programs.</a:t>
+            </a:r>
+          </a:p>
+          <a:p>
+            <a:pPr lvl="1"/>
+            <a:r>
+              <a:t>Section 3: Data quality remediation. EMP051 contributes to ast emp051 01 through recurring collaboration, clear ownership boundaries, and measurable outcomes. The team captures decisions, open issues, and handoffs so that knowledge remains discoverable for future programs.</a:t>
+            </a:r>
+          </a:p>
+        </p:txBody>
+      </p:sp>
+    </p:spTree>
+  </p:cSld>
+  <p:clrMapOvr>
+    <a:masterClrMapping/>
+  </p:clrMapOvr>
+</p:sld>
+</file>
+
+<file path=ppt/slides/slide5.xml><?xml version="1.0" encoding="utf-8"?>
+<p:sld xmlns:a="http://schemas.openxmlformats.org/drawingml/2006/main" xmlns:p="http://schemas.openxmlformats.org/presentationml/2006/main" xmlns:r="http://schemas.openxmlformats.org/officeDocument/2006/relationships">
+  <p:cSld>
+    <p:spTree>
+      <p:nvGrpSpPr>
+        <p:cNvPr id="1" name=""/>
+        <p:cNvGrpSpPr/>
+        <p:nvPr/>
+      </p:nvGrpSpPr>
+      <p:grpSpPr/>
+      <p:sp>
+        <p:nvSpPr>
+          <p:cNvPr id="2" name="Title 1"/>
+          <p:cNvSpPr>
+            <a:spLocks noGrp="1"/>
+          </p:cNvSpPr>
+          <p:nvPr>
+            <p:ph type="title"/>
+          </p:nvPr>
+        </p:nvSpPr>
+        <p:spPr/>
+        <p:txBody>
+          <a:bodyPr/>
+          <a:lstStyle/>
+          <a:p>
+            <a:r>
+              <a:t>Ast Emp051 01 - EMP051</a:t>
+            </a:r>
+          </a:p>
+        </p:txBody>
+      </p:sp>
+      <p:sp>
+        <p:nvSpPr>
+          <p:cNvPr id="3" name="Content Placeholder 2"/>
+          <p:cNvSpPr>
+            <a:spLocks noGrp="1"/>
+          </p:cNvSpPr>
+          <p:nvPr>
+            <p:ph idx="1"/>
+          </p:nvPr>
+        </p:nvSpPr>
+        <p:spPr/>
+        <p:txBody>
+          <a:bodyPr/>
+          <a:lstStyle/>
+          <a:p>
+            <a:r>
+              <a:t>Slide 5: Executive Summary</a:t>
+            </a:r>
+          </a:p>
+          <a:p>
+            <a:pPr lvl="1"/>
+            <a:r>
+              <a:t>Section 1: Knowledge transfer and onboarding. EMP051 contributes to ast emp051 01 through recurring collaboration, clear ownership boundaries, and measurable outcomes. The team captures decisions, open issues, and handoffs so that knowledge remains discoverable for future programs.</a:t>
+            </a:r>
+          </a:p>
+          <a:p>
+            <a:pPr lvl="1"/>
+            <a:r>
+              <a:t>Section 2: Data quality remediation. EMP051 contributes to ast emp051 01 through recurring collaboration, clear ownership boundaries, and measurable outcomes. The team captures decisions, open issues, and handoffs so that knowledge remains discoverable for future programs.</a:t>
+            </a:r>
+          </a:p>
+          <a:p>
+            <a:pPr lvl="1"/>
+            <a:r>
+              <a:t>Section 3: Operational risk review. EMP051 contributes to ast emp051 01 through recurring collaboration, clear ownership boundaries, and measurable outcomes. The team captures decisions, open issues, and handoffs so that knowledge remains discoverable for future programs.</a:t>
             </a:r>
           </a:p>
         </p:txBody>
